--- a/dist/초3/영어/읽기와문화/초3_영어_읽기와문화_02_나라별인사문화_학생용.pptx
+++ b/dist/초3/영어/읽기와문화/초3_영어_읽기와문화_02_나라별인사문화_학생용.pptx
@@ -119,13 +119,13 @@
   <p:extLst>
     <p:ext uri="{521415D9-36F7-43E2-AB2F-B90AF26B5E84}">
       <p14:sectionLst xmlns:p14="http://schemas.microsoft.com/office/powerpoint/2010/main">
-        <p14:section name="도입" id="{1baf4fea-7b7f-e8a0-e740-fc467cd9218a}">
+        <p14:section name="도입" id="{5069ea49-db63-5e13-c8c0-cc1972d4a68e}">
           <p14:sldIdLst>
             <p14:sldId id="256"/>
             <p14:sldId id="257"/>
           </p14:sldIdLst>
         </p14:section>
-        <p14:section name="개념" id="{7e689fa0-ffdf-c779-e481-0ca65c9b5890}">
+        <p14:section name="개념" id="{91c8a833-4ffb-7b9b-81fa-bc5d2a0424ca}">
           <p14:sldIdLst>
             <p14:sldId id="258"/>
             <p14:sldId id="259"/>
@@ -133,31 +133,31 @@
             <p14:sldId id="262"/>
           </p14:sldIdLst>
         </p14:section>
-        <p14:section name="연습" id="{4c24290e-df68-5b9c-de58-e2257091fd0d}">
+        <p14:section name="연습" id="{53e72c98-ddd6-9872-82f6-400dadbe3754}">
           <p14:sldIdLst>
             <p14:sldId id="261"/>
             <p14:sldId id="263"/>
             <p14:sldId id="264"/>
           </p14:sldIdLst>
         </p14:section>
-        <p14:section name="개념" id="{d74503ad-8cc1-46ca-c332-bc890d754aa3}">
+        <p14:section name="개념" id="{d6f83772-a590-e067-76c9-696775ef65f8}">
           <p14:sldIdLst/>
         </p14:section>
-        <p14:section name="연습" id="{50c804a1-f0aa-7f62-b1bf-2958bd5a89d5}">
+        <p14:section name="연습" id="{94581a40-f694-c80e-f465-3a1e7761cb15}">
           <p14:sldIdLst/>
         </p14:section>
-        <p14:section name="확인" id="{cf5e3f2b-79a3-18f7-7647-ed3337a85906}">
+        <p14:section name="확인" id="{c16cf738-544b-3408-de4d-fdd8cf665b39}">
           <p14:sldIdLst>
             <p14:sldId id="265"/>
             <p14:sldId id="266"/>
           </p14:sldIdLst>
         </p14:section>
-        <p14:section name="정리" id="{f48290c9-c3f1-8f96-12b4-df8b3cc79f3c}">
+        <p14:section name="정리" id="{684df4c1-16bc-1cdd-c6ea-9f025865ee6f}">
           <p14:sldIdLst>
             <p14:sldId id="267"/>
           </p14:sldIdLst>
         </p14:section>
-        <p14:section name="보충" id="{d1cf4af2-4fe5-17cc-baf5-878fff183842}">
+        <p14:section name="보충" id="{4d8a9397-f864-7350-20a8-cc4a1ccff44f}">
           <p14:sldIdLst>
             <p14:sldId id="268"/>
           </p14:sldIdLst>

--- a/dist/초3/영어/읽기와문화/초3_영어_읽기와문화_02_나라별인사문화_학생용.pptx
+++ b/dist/초3/영어/읽기와문화/초3_영어_읽기와문화_02_나라별인사문화_학생용.pptx
@@ -119,13 +119,13 @@
   <p:extLst>
     <p:ext uri="{521415D9-36F7-43E2-AB2F-B90AF26B5E84}">
       <p14:sectionLst xmlns:p14="http://schemas.microsoft.com/office/powerpoint/2010/main">
-        <p14:section name="도입" id="{5069ea49-db63-5e13-c8c0-cc1972d4a68e}">
+        <p14:section name="도입" id="{665f0efe-aaac-5cd5-77b2-51db634662de}">
           <p14:sldIdLst>
             <p14:sldId id="256"/>
             <p14:sldId id="257"/>
           </p14:sldIdLst>
         </p14:section>
-        <p14:section name="개념" id="{91c8a833-4ffb-7b9b-81fa-bc5d2a0424ca}">
+        <p14:section name="개념" id="{fe7a81b7-ab9d-616b-159a-be86d8de531d}">
           <p14:sldIdLst>
             <p14:sldId id="258"/>
             <p14:sldId id="259"/>
@@ -133,31 +133,31 @@
             <p14:sldId id="262"/>
           </p14:sldIdLst>
         </p14:section>
-        <p14:section name="연습" id="{53e72c98-ddd6-9872-82f6-400dadbe3754}">
+        <p14:section name="연습" id="{931f8f99-4b70-c6d6-04ee-8bde8132db91}">
           <p14:sldIdLst>
             <p14:sldId id="261"/>
             <p14:sldId id="263"/>
             <p14:sldId id="264"/>
           </p14:sldIdLst>
         </p14:section>
-        <p14:section name="개념" id="{d6f83772-a590-e067-76c9-696775ef65f8}">
+        <p14:section name="개념" id="{d634b332-5b14-7d16-2e42-d6c4d7f2ee28}">
           <p14:sldIdLst/>
         </p14:section>
-        <p14:section name="연습" id="{94581a40-f694-c80e-f465-3a1e7761cb15}">
+        <p14:section name="연습" id="{392a7fd5-5363-fa33-362b-138895772920}">
           <p14:sldIdLst/>
         </p14:section>
-        <p14:section name="확인" id="{c16cf738-544b-3408-de4d-fdd8cf665b39}">
+        <p14:section name="확인" id="{37621c15-018e-849b-6ffa-9a821574af88}">
           <p14:sldIdLst>
             <p14:sldId id="265"/>
             <p14:sldId id="266"/>
           </p14:sldIdLst>
         </p14:section>
-        <p14:section name="정리" id="{684df4c1-16bc-1cdd-c6ea-9f025865ee6f}">
+        <p14:section name="정리" id="{8de5132c-49a7-15b0-71ab-e91f0e5e0791}">
           <p14:sldIdLst>
             <p14:sldId id="267"/>
           </p14:sldIdLst>
         </p14:section>
-        <p14:section name="보충" id="{4d8a9397-f864-7350-20a8-cc4a1ccff44f}">
+        <p14:section name="보충" id="{5e3350c1-20e0-32a2-fcf7-ff87bfc1c87c}">
           <p14:sldIdLst>
             <p14:sldId id="268"/>
           </p14:sldIdLst>
@@ -7197,7 +7197,7 @@
           </p:nvPr>
         </p:nvGraphicFramePr>
         <p:xfrm>
-          <a:off x="1065276" y="1805940"/>
+          <a:off x="1065276" y="1778508"/>
           <a:ext cx="10058400" cy="914400"/>
         </p:xfrm>
         <a:graphic>
@@ -7209,7 +7209,7 @@
                 <a:gridCol w="4626864"/>
                 <a:gridCol w="2615184"/>
               </a:tblGrid>
-              <a:tr h="472440">
+              <a:tr h="481584">
                 <a:tc>
                   <a:txBody>
                     <a:bodyPr/>
@@ -7415,7 +7415,7 @@
                   </a:tcPr>
                 </a:tc>
               </a:tr>
-              <a:tr h="472440">
+              <a:tr h="481584">
                 <a:tc>
                   <a:txBody>
                     <a:bodyPr/>
@@ -7621,7 +7621,7 @@
                   </a:tcPr>
                 </a:tc>
               </a:tr>
-              <a:tr h="472440">
+              <a:tr h="481584">
                 <a:tc>
                   <a:txBody>
                     <a:bodyPr/>
@@ -7827,7 +7827,7 @@
                   </a:tcPr>
                 </a:tc>
               </a:tr>
-              <a:tr h="472440">
+              <a:tr h="481584">
                 <a:tc>
                   <a:txBody>
                     <a:bodyPr/>
@@ -8033,7 +8033,7 @@
                   </a:tcPr>
                 </a:tc>
               </a:tr>
-              <a:tr h="472440">
+              <a:tr h="481584">
                 <a:tc>
                   <a:txBody>
                     <a:bodyPr/>
@@ -8239,7 +8239,7 @@
                   </a:tcPr>
                 </a:tc>
               </a:tr>
-              <a:tr h="472440">
+              <a:tr h="481584">
                 <a:tc>
                   <a:txBody>
                     <a:bodyPr/>
